--- a/CalendarioAgo25/Presentaciones/6_DHCP.pptx
+++ b/CalendarioAgo25/Presentaciones/6_DHCP.pptx
@@ -132,6 +132,43 @@
 </p:presentation>
 </file>
 
+<file path=ppt/revisionInfo.xml><?xml version="1.0" encoding="utf-8"?>
+<p1510:revInfo xmlns:a="http://schemas.openxmlformats.org/drawingml/2006/main" xmlns:r="http://schemas.openxmlformats.org/officeDocument/2006/relationships" xmlns:p1510="http://schemas.microsoft.com/office/powerpoint/2015/10/main">
+  <p1510:revLst>
+    <p1510:client id="{CC6F7349-3C88-40AC-B6E0-2435CC391078}" v="1" dt="2025-10-07T15:19:56.677"/>
+  </p1510:revLst>
+</p1510:revInfo>
+</file>
+
+<file path=ppt/changesInfos/changesInfo1.xml><?xml version="1.0" encoding="utf-8"?>
+<pc:chgInfo xmlns:a="http://schemas.openxmlformats.org/drawingml/2006/main" xmlns:r="http://schemas.openxmlformats.org/officeDocument/2006/relationships" xmlns:ac="http://schemas.microsoft.com/office/drawing/2013/main/command" xmlns:pc="http://schemas.microsoft.com/office/powerpoint/2013/main/command">
+  <pc:docChgLst>
+    <pc:chgData name="Lizethe Pérez Fuertes" userId="4ae9ef87-2a7d-42f8-8dfa-0a501a9e2ff4" providerId="ADAL" clId="{FDDD45CB-1330-4033-A842-3D2746AFF7C7}"/>
+    <pc:docChg chg="modSld">
+      <pc:chgData name="Lizethe Pérez Fuertes" userId="4ae9ef87-2a7d-42f8-8dfa-0a501a9e2ff4" providerId="ADAL" clId="{FDDD45CB-1330-4033-A842-3D2746AFF7C7}" dt="2025-10-07T15:19:56.677" v="0" actId="1076"/>
+      <pc:docMkLst>
+        <pc:docMk/>
+      </pc:docMkLst>
+      <pc:sldChg chg="modSp">
+        <pc:chgData name="Lizethe Pérez Fuertes" userId="4ae9ef87-2a7d-42f8-8dfa-0a501a9e2ff4" providerId="ADAL" clId="{FDDD45CB-1330-4033-A842-3D2746AFF7C7}" dt="2025-10-07T15:19:56.677" v="0" actId="1076"/>
+        <pc:sldMkLst>
+          <pc:docMk/>
+          <pc:sldMk cId="100494574" sldId="327"/>
+        </pc:sldMkLst>
+        <pc:spChg chg="mod">
+          <ac:chgData name="Lizethe Pérez Fuertes" userId="4ae9ef87-2a7d-42f8-8dfa-0a501a9e2ff4" providerId="ADAL" clId="{FDDD45CB-1330-4033-A842-3D2746AFF7C7}" dt="2025-10-07T15:19:56.677" v="0" actId="1076"/>
+          <ac:spMkLst>
+            <pc:docMk/>
+            <pc:sldMk cId="100494574" sldId="327"/>
+            <ac:spMk id="6" creationId="{5772A933-D941-4E32-BDF8-2AFE688F3549}"/>
+          </ac:spMkLst>
+        </pc:spChg>
+      </pc:sldChg>
+    </pc:docChg>
+  </pc:docChgLst>
+</pc:chgInfo>
+</file>
+
 <file path=ppt/notesMasters/notesMaster1.xml><?xml version="1.0" encoding="utf-8"?>
 <p:notesMaster xmlns:a="http://schemas.openxmlformats.org/drawingml/2006/main" xmlns:r="http://schemas.openxmlformats.org/officeDocument/2006/relationships" xmlns:p="http://schemas.openxmlformats.org/presentationml/2006/main">
   <p:cSld>
@@ -214,7 +251,7 @@
           <a:p>
             <a:fld id="{2D445F07-8756-451B-A938-0248325FC7BB}" type="datetimeFigureOut">
               <a:rPr lang="es-MX" smtClean="0"/>
-              <a:t>13/05/2025</a:t>
+              <a:t>07/10/2025</a:t>
             </a:fld>
             <a:endParaRPr lang="es-MX" dirty="0"/>
           </a:p>
@@ -373,7 +410,7 @@
           <a:p>
             <a:fld id="{5993AEC0-242E-4FA7-9D3C-51E1036AC3CB}" type="slidenum">
               <a:rPr lang="es-MX" smtClean="0"/>
-              <a:t>‹#›</a:t>
+              <a:t>‹Nº›</a:t>
             </a:fld>
             <a:endParaRPr lang="es-MX" dirty="0"/>
           </a:p>
@@ -1003,7 +1040,7 @@
           <a:p>
             <a:fld id="{5E75A0DC-66C6-4CEC-A5EB-F8C97CEC3796}" type="datetimeFigureOut">
               <a:rPr lang="es-MX" smtClean="0"/>
-              <a:t>13/05/2025</a:t>
+              <a:t>07/10/2025</a:t>
             </a:fld>
             <a:endParaRPr lang="es-MX" dirty="0"/>
           </a:p>
@@ -1045,7 +1082,7 @@
           <a:p>
             <a:fld id="{C077EE1E-7A06-4E7F-9AFB-189FC69B7B0C}" type="slidenum">
               <a:rPr lang="es-MX" smtClean="0"/>
-              <a:t>‹#›</a:t>
+              <a:t>‹Nº›</a:t>
             </a:fld>
             <a:endParaRPr lang="es-MX" dirty="0"/>
           </a:p>
@@ -1173,7 +1210,7 @@
           <a:p>
             <a:fld id="{5E75A0DC-66C6-4CEC-A5EB-F8C97CEC3796}" type="datetimeFigureOut">
               <a:rPr lang="es-MX" smtClean="0"/>
-              <a:t>13/05/2025</a:t>
+              <a:t>07/10/2025</a:t>
             </a:fld>
             <a:endParaRPr lang="es-MX" dirty="0"/>
           </a:p>
@@ -1215,7 +1252,7 @@
           <a:p>
             <a:fld id="{C077EE1E-7A06-4E7F-9AFB-189FC69B7B0C}" type="slidenum">
               <a:rPr lang="es-MX" smtClean="0"/>
-              <a:t>‹#›</a:t>
+              <a:t>‹Nº›</a:t>
             </a:fld>
             <a:endParaRPr lang="es-MX" dirty="0"/>
           </a:p>
@@ -1353,7 +1390,7 @@
           <a:p>
             <a:fld id="{5E75A0DC-66C6-4CEC-A5EB-F8C97CEC3796}" type="datetimeFigureOut">
               <a:rPr lang="es-MX" smtClean="0"/>
-              <a:t>13/05/2025</a:t>
+              <a:t>07/10/2025</a:t>
             </a:fld>
             <a:endParaRPr lang="es-MX" dirty="0"/>
           </a:p>
@@ -1395,7 +1432,7 @@
           <a:p>
             <a:fld id="{C077EE1E-7A06-4E7F-9AFB-189FC69B7B0C}" type="slidenum">
               <a:rPr lang="es-MX" smtClean="0"/>
-              <a:t>‹#›</a:t>
+              <a:t>‹Nº›</a:t>
             </a:fld>
             <a:endParaRPr lang="es-MX" dirty="0"/>
           </a:p>
@@ -1523,7 +1560,7 @@
           <a:p>
             <a:fld id="{5E75A0DC-66C6-4CEC-A5EB-F8C97CEC3796}" type="datetimeFigureOut">
               <a:rPr lang="es-MX" smtClean="0"/>
-              <a:t>13/05/2025</a:t>
+              <a:t>07/10/2025</a:t>
             </a:fld>
             <a:endParaRPr lang="es-MX" dirty="0"/>
           </a:p>
@@ -1565,7 +1602,7 @@
           <a:p>
             <a:fld id="{C077EE1E-7A06-4E7F-9AFB-189FC69B7B0C}" type="slidenum">
               <a:rPr lang="es-MX" smtClean="0"/>
-              <a:t>‹#›</a:t>
+              <a:t>‹Nº›</a:t>
             </a:fld>
             <a:endParaRPr lang="es-MX" dirty="0"/>
           </a:p>
@@ -1769,7 +1806,7 @@
           <a:p>
             <a:fld id="{5E75A0DC-66C6-4CEC-A5EB-F8C97CEC3796}" type="datetimeFigureOut">
               <a:rPr lang="es-MX" smtClean="0"/>
-              <a:t>13/05/2025</a:t>
+              <a:t>07/10/2025</a:t>
             </a:fld>
             <a:endParaRPr lang="es-MX" dirty="0"/>
           </a:p>
@@ -1811,7 +1848,7 @@
           <a:p>
             <a:fld id="{C077EE1E-7A06-4E7F-9AFB-189FC69B7B0C}" type="slidenum">
               <a:rPr lang="es-MX" smtClean="0"/>
-              <a:t>‹#›</a:t>
+              <a:t>‹Nº›</a:t>
             </a:fld>
             <a:endParaRPr lang="es-MX" dirty="0"/>
           </a:p>
@@ -2057,7 +2094,7 @@
           <a:p>
             <a:fld id="{5E75A0DC-66C6-4CEC-A5EB-F8C97CEC3796}" type="datetimeFigureOut">
               <a:rPr lang="es-MX" smtClean="0"/>
-              <a:t>13/05/2025</a:t>
+              <a:t>07/10/2025</a:t>
             </a:fld>
             <a:endParaRPr lang="es-MX" dirty="0"/>
           </a:p>
@@ -2099,7 +2136,7 @@
           <a:p>
             <a:fld id="{C077EE1E-7A06-4E7F-9AFB-189FC69B7B0C}" type="slidenum">
               <a:rPr lang="es-MX" smtClean="0"/>
-              <a:t>‹#›</a:t>
+              <a:t>‹Nº›</a:t>
             </a:fld>
             <a:endParaRPr lang="es-MX" dirty="0"/>
           </a:p>
@@ -2479,7 +2516,7 @@
           <a:p>
             <a:fld id="{5E75A0DC-66C6-4CEC-A5EB-F8C97CEC3796}" type="datetimeFigureOut">
               <a:rPr lang="es-MX" smtClean="0"/>
-              <a:t>13/05/2025</a:t>
+              <a:t>07/10/2025</a:t>
             </a:fld>
             <a:endParaRPr lang="es-MX" dirty="0"/>
           </a:p>
@@ -2521,7 +2558,7 @@
           <a:p>
             <a:fld id="{C077EE1E-7A06-4E7F-9AFB-189FC69B7B0C}" type="slidenum">
               <a:rPr lang="es-MX" smtClean="0"/>
-              <a:t>‹#›</a:t>
+              <a:t>‹Nº›</a:t>
             </a:fld>
             <a:endParaRPr lang="es-MX" dirty="0"/>
           </a:p>
@@ -2597,7 +2634,7 @@
           <a:p>
             <a:fld id="{5E75A0DC-66C6-4CEC-A5EB-F8C97CEC3796}" type="datetimeFigureOut">
               <a:rPr lang="es-MX" smtClean="0"/>
-              <a:t>13/05/2025</a:t>
+              <a:t>07/10/2025</a:t>
             </a:fld>
             <a:endParaRPr lang="es-MX" dirty="0"/>
           </a:p>
@@ -2639,7 +2676,7 @@
           <a:p>
             <a:fld id="{C077EE1E-7A06-4E7F-9AFB-189FC69B7B0C}" type="slidenum">
               <a:rPr lang="es-MX" smtClean="0"/>
-              <a:t>‹#›</a:t>
+              <a:t>‹Nº›</a:t>
             </a:fld>
             <a:endParaRPr lang="es-MX" dirty="0"/>
           </a:p>
@@ -2692,7 +2729,7 @@
           <a:p>
             <a:fld id="{5E75A0DC-66C6-4CEC-A5EB-F8C97CEC3796}" type="datetimeFigureOut">
               <a:rPr lang="es-MX" smtClean="0"/>
-              <a:t>13/05/2025</a:t>
+              <a:t>07/10/2025</a:t>
             </a:fld>
             <a:endParaRPr lang="es-MX" dirty="0"/>
           </a:p>
@@ -2734,7 +2771,7 @@
           <a:p>
             <a:fld id="{C077EE1E-7A06-4E7F-9AFB-189FC69B7B0C}" type="slidenum">
               <a:rPr lang="es-MX" smtClean="0"/>
-              <a:t>‹#›</a:t>
+              <a:t>‹Nº›</a:t>
             </a:fld>
             <a:endParaRPr lang="es-MX" dirty="0"/>
           </a:p>
@@ -2969,7 +3006,7 @@
           <a:p>
             <a:fld id="{5E75A0DC-66C6-4CEC-A5EB-F8C97CEC3796}" type="datetimeFigureOut">
               <a:rPr lang="es-MX" smtClean="0"/>
-              <a:t>13/05/2025</a:t>
+              <a:t>07/10/2025</a:t>
             </a:fld>
             <a:endParaRPr lang="es-MX" dirty="0"/>
           </a:p>
@@ -3011,7 +3048,7 @@
           <a:p>
             <a:fld id="{C077EE1E-7A06-4E7F-9AFB-189FC69B7B0C}" type="slidenum">
               <a:rPr lang="es-MX" smtClean="0"/>
-              <a:t>‹#›</a:t>
+              <a:t>‹Nº›</a:t>
             </a:fld>
             <a:endParaRPr lang="es-MX" dirty="0"/>
           </a:p>
@@ -3222,7 +3259,7 @@
           <a:p>
             <a:fld id="{5E75A0DC-66C6-4CEC-A5EB-F8C97CEC3796}" type="datetimeFigureOut">
               <a:rPr lang="es-MX" smtClean="0"/>
-              <a:t>13/05/2025</a:t>
+              <a:t>07/10/2025</a:t>
             </a:fld>
             <a:endParaRPr lang="es-MX" dirty="0"/>
           </a:p>
@@ -3264,7 +3301,7 @@
           <a:p>
             <a:fld id="{C077EE1E-7A06-4E7F-9AFB-189FC69B7B0C}" type="slidenum">
               <a:rPr lang="es-MX" smtClean="0"/>
-              <a:t>‹#›</a:t>
+              <a:t>‹Nº›</a:t>
             </a:fld>
             <a:endParaRPr lang="es-MX" dirty="0"/>
           </a:p>
@@ -3435,7 +3472,7 @@
           <a:p>
             <a:fld id="{5E75A0DC-66C6-4CEC-A5EB-F8C97CEC3796}" type="datetimeFigureOut">
               <a:rPr lang="es-MX" smtClean="0"/>
-              <a:t>13/05/2025</a:t>
+              <a:t>07/10/2025</a:t>
             </a:fld>
             <a:endParaRPr lang="es-MX" dirty="0"/>
           </a:p>
@@ -3513,7 +3550,7 @@
           <a:p>
             <a:fld id="{C077EE1E-7A06-4E7F-9AFB-189FC69B7B0C}" type="slidenum">
               <a:rPr lang="es-MX" smtClean="0"/>
-              <a:t>‹#›</a:t>
+              <a:t>‹Nº›</a:t>
             </a:fld>
             <a:endParaRPr lang="es-MX" dirty="0"/>
           </a:p>
@@ -7277,7 +7314,7 @@
         </p:nvSpPr>
         <p:spPr bwMode="auto">
           <a:xfrm>
-            <a:off x="1331640" y="3933056"/>
+            <a:off x="1259632" y="3933056"/>
             <a:ext cx="7344816" cy="939231"/>
           </a:xfrm>
           <a:prstGeom prst="rect">
